--- a/public/templates/proposta_modelo.pptx
+++ b/public/templates/proposta_modelo.pptx
@@ -234,7 +234,7 @@
           <a:p>
             <a:fld id="{84ECA2C1-621C-494E-B857-5488FF2C591A}" type="datetimeFigureOut">
               <a:rPr lang="en-US" smtClean="0"/>
-              <a:t>4/8/2026</a:t>
+              <a:t>4/9/2026</a:t>
             </a:fld>
             <a:endParaRPr lang="en-US"/>
           </a:p>
@@ -840,7 +840,7 @@
           <a:p>
             <a:fld id="{3C7DFDA3-4388-4038-AA2F-244EBFE20E4D}" type="datetime1">
               <a:rPr lang="en-US" smtClean="0"/>
-              <a:t>4/8/2026</a:t>
+              <a:t>4/9/2026</a:t>
             </a:fld>
             <a:endParaRPr lang="en-US"/>
           </a:p>
@@ -1017,7 +1017,7 @@
           <a:p>
             <a:fld id="{684AB122-88AE-4FEC-A912-E2A4173C5280}" type="datetime1">
               <a:rPr lang="en-US" smtClean="0"/>
-              <a:t>4/8/2026</a:t>
+              <a:t>4/9/2026</a:t>
             </a:fld>
             <a:endParaRPr lang="en-US"/>
           </a:p>
@@ -3601,7 +3601,7 @@
           <a:p>
             <a:fld id="{994EB4AB-1829-47B8-90F5-EEA403C3F884}" type="datetime1">
               <a:rPr lang="en-US" smtClean="0"/>
-              <a:t>4/8/2026</a:t>
+              <a:t>4/9/2026</a:t>
             </a:fld>
             <a:endParaRPr lang="en-US"/>
           </a:p>
@@ -3779,7 +3779,7 @@
           <a:p>
             <a:fld id="{E4191CDE-1ACC-4163-BF28-7501AC56C01E}" type="datetime1">
               <a:rPr lang="en-US" smtClean="0"/>
-              <a:t>4/8/2026</a:t>
+              <a:t>4/9/2026</a:t>
             </a:fld>
             <a:endParaRPr lang="en-US"/>
           </a:p>
@@ -3898,7 +3898,7 @@
           <a:p>
             <a:fld id="{582D863C-4E39-468F-B2DF-5BE5EE367C79}" type="datetime1">
               <a:rPr lang="en-US" smtClean="0"/>
-              <a:t>4/8/2026</a:t>
+              <a:t>4/9/2026</a:t>
             </a:fld>
             <a:endParaRPr lang="en-US"/>
           </a:p>
@@ -4123,7 +4123,7 @@
           <a:p>
             <a:fld id="{CC19EB55-CF1E-425A-B433-6D085A3D4FFE}" type="datetime1">
               <a:rPr lang="en-US" smtClean="0"/>
-              <a:t>4/8/2026</a:t>
+              <a:t>4/9/2026</a:t>
             </a:fld>
             <a:endParaRPr lang="en-US"/>
           </a:p>
@@ -6806,10 +6806,13 @@
                 <a:tab pos="4267200" algn="l"/>
               </a:tabLst>
             </a:pPr>
-            <a:endParaRPr lang="pt-BR" sz="2400" dirty="0">
-              <a:latin typeface="Futura Lt BT Light"/>
-              <a:ea typeface="Calibri" panose="020F0502020204030204" pitchFamily="34" charset="0"/>
-            </a:endParaRPr>
+            <a:r>
+              <a:rPr lang="pt-BR" sz="2400" dirty="0">
+                <a:latin typeface="Futura Lt BT Light"/>
+                <a:ea typeface="Calibri" panose="020F0502020204030204" pitchFamily="34" charset="0"/>
+              </a:rPr>
+              <a:t>{{DOCUMENTAÇÃO NECESSÁRIA}}</a:t>
+            </a:r>
           </a:p>
           <a:p>
             <a:pPr marL="12700" marR="5080" algn="just">

--- a/public/templates/proposta_modelo.pptx
+++ b/public/templates/proposta_modelo.pptx
@@ -234,7 +234,7 @@
           <a:p>
             <a:fld id="{84ECA2C1-621C-494E-B857-5488FF2C591A}" type="datetimeFigureOut">
               <a:rPr lang="en-US" smtClean="0"/>
-              <a:t>4/9/2026</a:t>
+              <a:t>4/28/2026</a:t>
             </a:fld>
             <a:endParaRPr lang="en-US"/>
           </a:p>
@@ -840,7 +840,7 @@
           <a:p>
             <a:fld id="{3C7DFDA3-4388-4038-AA2F-244EBFE20E4D}" type="datetime1">
               <a:rPr lang="en-US" smtClean="0"/>
-              <a:t>4/9/2026</a:t>
+              <a:t>4/28/2026</a:t>
             </a:fld>
             <a:endParaRPr lang="en-US"/>
           </a:p>
@@ -1017,7 +1017,7 @@
           <a:p>
             <a:fld id="{684AB122-88AE-4FEC-A912-E2A4173C5280}" type="datetime1">
               <a:rPr lang="en-US" smtClean="0"/>
-              <a:t>4/9/2026</a:t>
+              <a:t>4/28/2026</a:t>
             </a:fld>
             <a:endParaRPr lang="en-US"/>
           </a:p>
@@ -3601,7 +3601,7 @@
           <a:p>
             <a:fld id="{994EB4AB-1829-47B8-90F5-EEA403C3F884}" type="datetime1">
               <a:rPr lang="en-US" smtClean="0"/>
-              <a:t>4/9/2026</a:t>
+              <a:t>4/28/2026</a:t>
             </a:fld>
             <a:endParaRPr lang="en-US"/>
           </a:p>
@@ -3779,7 +3779,7 @@
           <a:p>
             <a:fld id="{E4191CDE-1ACC-4163-BF28-7501AC56C01E}" type="datetime1">
               <a:rPr lang="en-US" smtClean="0"/>
-              <a:t>4/9/2026</a:t>
+              <a:t>4/28/2026</a:t>
             </a:fld>
             <a:endParaRPr lang="en-US"/>
           </a:p>
@@ -3898,7 +3898,7 @@
           <a:p>
             <a:fld id="{582D863C-4E39-468F-B2DF-5BE5EE367C79}" type="datetime1">
               <a:rPr lang="en-US" smtClean="0"/>
-              <a:t>4/9/2026</a:t>
+              <a:t>4/28/2026</a:t>
             </a:fld>
             <a:endParaRPr lang="en-US"/>
           </a:p>
@@ -4123,7 +4123,7 @@
           <a:p>
             <a:fld id="{CC19EB55-CF1E-425A-B433-6D085A3D4FFE}" type="datetime1">
               <a:rPr lang="en-US" smtClean="0"/>
-              <a:t>4/9/2026</a:t>
+              <a:t>4/28/2026</a:t>
             </a:fld>
             <a:endParaRPr lang="en-US"/>
           </a:p>
@@ -6501,7 +6501,7 @@
         <p:spPr>
           <a:xfrm>
             <a:off x="540183" y="1843997"/>
-            <a:ext cx="16368785" cy="576120"/>
+            <a:ext cx="16368785" cy="1838004"/>
           </a:xfrm>
           <a:prstGeom prst="rect">
             <a:avLst/>
@@ -6543,6 +6543,70 @@
               </a:rPr>
               <a:t>{{TEXTO_ESCOPO}}</a:t>
             </a:r>
+            <a:endParaRPr lang="pt-BR" sz="2400" dirty="0">
+              <a:latin typeface="Futura Lt BT Light"/>
+              <a:ea typeface="Calibri" panose="020F0502020204030204" pitchFamily="34" charset="0"/>
+            </a:endParaRPr>
+          </a:p>
+          <a:p>
+            <a:pPr marL="342900" marR="13970" lvl="0" indent="-342900" algn="just">
+              <a:lnSpc>
+                <a:spcPct val="150000"/>
+              </a:lnSpc>
+              <a:spcAft>
+                <a:spcPts val="600"/>
+              </a:spcAft>
+              <a:buFont typeface="Symbol" panose="05050102010706020507" pitchFamily="18" charset="2"/>
+              <a:buBlip>
+                <a:blip r:embed="rId2"/>
+              </a:buBlip>
+              <a:tabLst>
+                <a:tab pos="355600" algn="l"/>
+                <a:tab pos="711200" algn="l"/>
+                <a:tab pos="1066800" algn="l"/>
+                <a:tab pos="1422400" algn="l"/>
+                <a:tab pos="1778000" algn="l"/>
+                <a:tab pos="2133600" algn="l"/>
+                <a:tab pos="2489200" algn="l"/>
+                <a:tab pos="2844800" algn="l"/>
+                <a:tab pos="3200400" algn="l"/>
+                <a:tab pos="3556000" algn="l"/>
+                <a:tab pos="3911600" algn="l"/>
+                <a:tab pos="4267200" algn="l"/>
+              </a:tabLst>
+            </a:pPr>
+            <a:endParaRPr lang="pt-BR" sz="2400" dirty="0">
+              <a:latin typeface="Futura Lt BT Light"/>
+              <a:ea typeface="Calibri" panose="020F0502020204030204" pitchFamily="34" charset="0"/>
+            </a:endParaRPr>
+          </a:p>
+          <a:p>
+            <a:pPr marL="12700" marR="5080" algn="just">
+              <a:lnSpc>
+                <a:spcPct val="150000"/>
+              </a:lnSpc>
+              <a:spcAft>
+                <a:spcPts val="600"/>
+              </a:spcAft>
+              <a:tabLst>
+                <a:tab pos="355600" algn="l"/>
+                <a:tab pos="711200" algn="l"/>
+                <a:tab pos="1066800" algn="l"/>
+                <a:tab pos="1422400" algn="l"/>
+                <a:tab pos="1778000" algn="l"/>
+                <a:tab pos="2133600" algn="l"/>
+                <a:tab pos="2489200" algn="l"/>
+                <a:tab pos="2844800" algn="l"/>
+                <a:tab pos="3200400" algn="l"/>
+                <a:tab pos="3556000" algn="l"/>
+                <a:tab pos="3911600" algn="l"/>
+                <a:tab pos="4267200" algn="l"/>
+              </a:tabLst>
+            </a:pPr>
+            <a:endParaRPr sz="2400" dirty="0">
+              <a:latin typeface="Futura Lt BT Light"/>
+              <a:ea typeface="Calibri" panose="020F0502020204030204" pitchFamily="34" charset="0"/>
+            </a:endParaRPr>
           </a:p>
         </p:txBody>
       </p:sp>
@@ -8714,7 +8778,7 @@
         <p:spPr>
           <a:xfrm>
             <a:off x="542681" y="1905331"/>
-            <a:ext cx="15271821" cy="7264489"/>
+            <a:ext cx="15271821" cy="8261621"/>
           </a:xfrm>
           <a:prstGeom prst="rect">
             <a:avLst/>
@@ -8740,7 +8804,7 @@
             <a:r>
               <a:rPr lang="pt-BR" sz="2400" dirty="0">
                 <a:solidFill>
-                  <a:srgbClr val="FFFFFF"/>
+                  <a:schemeClr val="bg1"/>
                 </a:solidFill>
                 <a:latin typeface="Futura Lt BT Light"/>
               </a:rPr>
@@ -8749,7 +8813,7 @@
             <a:r>
               <a:rPr lang="pt-BR" sz="2400" dirty="0" err="1">
                 <a:solidFill>
-                  <a:srgbClr val="FFFFFF"/>
+                  <a:schemeClr val="bg1"/>
                 </a:solidFill>
                 <a:latin typeface="Futura Lt BT Light"/>
               </a:rPr>
@@ -8758,7 +8822,7 @@
             <a:r>
               <a:rPr lang="pt-BR" sz="2400" dirty="0">
                 <a:solidFill>
-                  <a:srgbClr val="FFFFFF"/>
+                  <a:schemeClr val="bg1"/>
                 </a:solidFill>
                 <a:latin typeface="Futura Lt BT Light"/>
               </a:rPr>
@@ -8779,16 +8843,16 @@
             </a:pPr>
             <a:endParaRPr lang="pt-BR" sz="2400" b="1" spc="-15" noProof="0" dirty="0">
               <a:solidFill>
-                <a:srgbClr val="FFFFFF"/>
+                <a:schemeClr val="bg1"/>
               </a:solidFill>
               <a:latin typeface="Futura Lt BT Light"/>
               <a:cs typeface="Futura PT Book"/>
             </a:endParaRPr>
           </a:p>
           <a:p>
-            <a:pPr marL="12700" marR="290830" algn="just">
+            <a:pPr marL="342900" marR="13970" indent="-342900" algn="just">
               <a:lnSpc>
-                <a:spcPct val="110500"/>
+                <a:spcPct val="150000"/>
               </a:lnSpc>
               <a:spcBef>
                 <a:spcPts val="600"/>
@@ -8796,79 +8860,39 @@
               <a:spcAft>
                 <a:spcPts val="600"/>
               </a:spcAft>
+              <a:buBlip>
+                <a:blip r:embed="rId2"/>
+              </a:buBlip>
+              <a:tabLst>
+                <a:tab pos="355600" algn="l"/>
+                <a:tab pos="711200" algn="l"/>
+                <a:tab pos="1066800" algn="l"/>
+                <a:tab pos="1422400" algn="l"/>
+                <a:tab pos="1778000" algn="l"/>
+                <a:tab pos="2133600" algn="l"/>
+                <a:tab pos="2489200" algn="l"/>
+                <a:tab pos="2844800" algn="l"/>
+                <a:tab pos="3200400" algn="l"/>
+                <a:tab pos="3556000" algn="l"/>
+                <a:tab pos="3911600" algn="l"/>
+                <a:tab pos="4267200" algn="l"/>
+              </a:tabLst>
             </a:pPr>
             <a:r>
               <a:rPr lang="pt-BR" sz="2400" b="1" dirty="0">
                 <a:solidFill>
-                  <a:srgbClr val="FFFFFF"/>
-                </a:solidFill>
-                <a:latin typeface="Futura Lt BT Light"/>
-                <a:cs typeface="Futura PT Heavy"/>
-              </a:rPr>
-              <a:t>{{CONDIÇÃO DE PAGAMENTO 1}} </a:t>
-            </a:r>
-            <a:r>
-              <a:rPr lang="pt-BR" sz="2400" b="1" spc="5" noProof="0" dirty="0">
-                <a:solidFill>
-                  <a:srgbClr val="FFFFFF"/>
-                </a:solidFill>
-                <a:latin typeface="Futura Lt BT Light"/>
-                <a:cs typeface="Futura PT Heavy"/>
-              </a:rPr>
-              <a:t>no </a:t>
-            </a:r>
-            <a:r>
-              <a:rPr lang="pt-BR" sz="2400" b="1" noProof="0" dirty="0">
-                <a:solidFill>
-                  <a:srgbClr val="FFFFFF"/>
-                </a:solidFill>
-                <a:latin typeface="Futura Lt BT Light"/>
-                <a:cs typeface="Futura PT Heavy"/>
-              </a:rPr>
-              <a:t>aceite</a:t>
-            </a:r>
-            <a:r>
-              <a:rPr lang="pt-BR" sz="2400" b="1" spc="5" noProof="0" dirty="0">
-                <a:solidFill>
-                  <a:srgbClr val="FFFFFF"/>
-                </a:solidFill>
-                <a:latin typeface="Futura Lt BT Light"/>
-                <a:cs typeface="Futura PT Heavy"/>
-              </a:rPr>
-              <a:t> </a:t>
-            </a:r>
-            <a:r>
-              <a:rPr lang="pt-BR" sz="2400" b="1" noProof="0" dirty="0">
-                <a:solidFill>
-                  <a:srgbClr val="FFFFFF"/>
-                </a:solidFill>
-                <a:latin typeface="Futura Lt BT Light"/>
-                <a:cs typeface="Futura PT Heavy"/>
-              </a:rPr>
-              <a:t>da </a:t>
-            </a:r>
-            <a:r>
-              <a:rPr lang="pt-BR" sz="2400" b="1" spc="-10" noProof="0" dirty="0">
-                <a:solidFill>
-                  <a:srgbClr val="FFFFFF"/>
-                </a:solidFill>
-                <a:latin typeface="Futura Lt BT Light"/>
-                <a:cs typeface="Futura PT Heavy"/>
-              </a:rPr>
-              <a:t>proposta;</a:t>
-            </a:r>
-            <a:r>
-              <a:rPr lang="pt-BR" sz="2400" noProof="0" dirty="0">
-                <a:latin typeface="Futura Lt BT Light"/>
-                <a:cs typeface="Futura PT Heavy"/>
-              </a:rPr>
-              <a:t> </a:t>
+                  <a:schemeClr val="bg1"/>
+                </a:solidFill>
+                <a:latin typeface="Futura Lt BT Light"/>
+                <a:ea typeface="Calibri" panose="020F0502020204030204" pitchFamily="34" charset="0"/>
+              </a:rPr>
+              <a:t>{{CONDIÇÃO DE PAGAMENTO 1}} no aceite da proposta; </a:t>
             </a:r>
           </a:p>
           <a:p>
-            <a:pPr marL="12700" algn="just">
+            <a:pPr marL="342900" marR="13970" indent="-342900" algn="just">
               <a:lnSpc>
-                <a:spcPct val="100000"/>
+                <a:spcPct val="150000"/>
               </a:lnSpc>
               <a:spcBef>
                 <a:spcPts val="600"/>
@@ -8876,11 +8900,28 @@
               <a:spcAft>
                 <a:spcPts val="600"/>
               </a:spcAft>
+              <a:buBlip>
+                <a:blip r:embed="rId2"/>
+              </a:buBlip>
+              <a:tabLst>
+                <a:tab pos="355600" algn="l"/>
+                <a:tab pos="711200" algn="l"/>
+                <a:tab pos="1066800" algn="l"/>
+                <a:tab pos="1422400" algn="l"/>
+                <a:tab pos="1778000" algn="l"/>
+                <a:tab pos="2133600" algn="l"/>
+                <a:tab pos="2489200" algn="l"/>
+                <a:tab pos="2844800" algn="l"/>
+                <a:tab pos="3200400" algn="l"/>
+                <a:tab pos="3556000" algn="l"/>
+                <a:tab pos="3911600" algn="l"/>
+                <a:tab pos="4267200" algn="l"/>
+              </a:tabLst>
             </a:pPr>
             <a:r>
               <a:rPr lang="pt-BR" sz="2400" b="1" dirty="0">
                 <a:solidFill>
-                  <a:srgbClr val="FFFFFF"/>
+                  <a:schemeClr val="bg1"/>
                 </a:solidFill>
                 <a:latin typeface="Futura Lt BT Light"/>
                 <a:cs typeface="Futura PT Heavy"/>
@@ -8890,7 +8931,7 @@
             <a:r>
               <a:rPr lang="pt-BR" sz="2400" b="1" spc="-50" dirty="0">
                 <a:solidFill>
-                  <a:srgbClr val="FFFFFF"/>
+                  <a:schemeClr val="bg1"/>
                 </a:solidFill>
                 <a:latin typeface="Futura Lt BT Light"/>
                 <a:cs typeface="Futura PT Heavy"/>
@@ -8899,9 +8940,9 @@
             </a:r>
           </a:p>
           <a:p>
-            <a:pPr marL="12700" algn="just">
+            <a:pPr marL="342900" marR="13970" indent="-342900" algn="just">
               <a:lnSpc>
-                <a:spcPct val="100000"/>
+                <a:spcPct val="150000"/>
               </a:lnSpc>
               <a:spcBef>
                 <a:spcPts val="600"/>
@@ -8909,11 +8950,28 @@
               <a:spcAft>
                 <a:spcPts val="600"/>
               </a:spcAft>
+              <a:buBlip>
+                <a:blip r:embed="rId2"/>
+              </a:buBlip>
+              <a:tabLst>
+                <a:tab pos="355600" algn="l"/>
+                <a:tab pos="711200" algn="l"/>
+                <a:tab pos="1066800" algn="l"/>
+                <a:tab pos="1422400" algn="l"/>
+                <a:tab pos="1778000" algn="l"/>
+                <a:tab pos="2133600" algn="l"/>
+                <a:tab pos="2489200" algn="l"/>
+                <a:tab pos="2844800" algn="l"/>
+                <a:tab pos="3200400" algn="l"/>
+                <a:tab pos="3556000" algn="l"/>
+                <a:tab pos="3911600" algn="l"/>
+                <a:tab pos="4267200" algn="l"/>
+              </a:tabLst>
             </a:pPr>
             <a:r>
               <a:rPr lang="pt-BR" sz="2400" b="1" dirty="0">
                 <a:solidFill>
-                  <a:srgbClr val="FFFFFF"/>
+                  <a:schemeClr val="bg1"/>
                 </a:solidFill>
                 <a:latin typeface="Futura Lt BT Light"/>
                 <a:cs typeface="Futura PT Heavy"/>
@@ -8923,7 +8981,7 @@
             <a:r>
               <a:rPr lang="pt-BR" sz="2400" b="1" spc="-50" noProof="0" dirty="0">
                 <a:solidFill>
-                  <a:srgbClr val="FFFFFF"/>
+                  <a:schemeClr val="bg1"/>
                 </a:solidFill>
                 <a:latin typeface="Futura Lt BT Light"/>
                 <a:cs typeface="Futura PT Heavy"/>
@@ -8933,7 +8991,7 @@
             <a:r>
               <a:rPr lang="pt-BR" sz="2400" b="1" spc="-10" noProof="0" dirty="0">
                 <a:solidFill>
-                  <a:srgbClr val="FFFFFF"/>
+                  <a:schemeClr val="bg1"/>
                 </a:solidFill>
                 <a:latin typeface="Futura Lt BT Light"/>
                 <a:cs typeface="Futura PT Heavy"/>
@@ -8941,6 +8999,9 @@
               <a:t>.</a:t>
             </a:r>
             <a:endParaRPr lang="pt-BR" sz="2400" noProof="0" dirty="0">
+              <a:solidFill>
+                <a:schemeClr val="bg1"/>
+              </a:solidFill>
               <a:latin typeface="Futura Lt BT Light"/>
               <a:cs typeface="Futura PT Heavy"/>
             </a:endParaRPr>
@@ -8958,6 +9019,9 @@
               </a:spcAft>
             </a:pPr>
             <a:endParaRPr lang="pt-BR" sz="2400" noProof="0" dirty="0">
+              <a:solidFill>
+                <a:schemeClr val="bg1"/>
+              </a:solidFill>
               <a:latin typeface="Futura Lt BT Light"/>
               <a:cs typeface="Futura PT Heavy"/>
             </a:endParaRPr>
@@ -8977,7 +9041,7 @@
             <a:r>
               <a:rPr lang="pt-BR" sz="2400" b="1" noProof="0" dirty="0">
                 <a:solidFill>
-                  <a:srgbClr val="FFFFFF"/>
+                  <a:schemeClr val="bg1"/>
                 </a:solidFill>
                 <a:latin typeface="Futura Lt BT Light"/>
                 <a:cs typeface="Futura PT Heavy"/>
@@ -8987,7 +9051,7 @@
             <a:r>
               <a:rPr lang="pt-BR" sz="2400" b="1" spc="-5" noProof="0" dirty="0">
                 <a:solidFill>
-                  <a:srgbClr val="FFFFFF"/>
+                  <a:schemeClr val="bg1"/>
                 </a:solidFill>
                 <a:latin typeface="Futura Lt BT Light"/>
                 <a:cs typeface="Futura PT Heavy"/>
@@ -8997,7 +9061,7 @@
             <a:r>
               <a:rPr lang="pt-BR" sz="2400" b="1" noProof="0" dirty="0">
                 <a:solidFill>
-                  <a:srgbClr val="FFFFFF"/>
+                  <a:schemeClr val="bg1"/>
                 </a:solidFill>
                 <a:latin typeface="Futura Lt BT Light"/>
                 <a:cs typeface="Futura PT Heavy"/>
@@ -9007,7 +9071,7 @@
             <a:r>
               <a:rPr lang="pt-BR" sz="2400" b="1" spc="5" noProof="0" dirty="0">
                 <a:solidFill>
-                  <a:srgbClr val="FFFFFF"/>
+                  <a:schemeClr val="bg1"/>
                 </a:solidFill>
                 <a:latin typeface="Futura Lt BT Light"/>
                 <a:cs typeface="Futura PT Heavy"/>
@@ -9017,7 +9081,7 @@
             <a:r>
               <a:rPr lang="pt-BR" sz="2400" b="1" noProof="0" dirty="0">
                 <a:solidFill>
-                  <a:srgbClr val="FFFFFF"/>
+                  <a:schemeClr val="bg1"/>
                 </a:solidFill>
                 <a:latin typeface="Futura Lt BT Light"/>
                 <a:cs typeface="Futura PT Heavy"/>
@@ -9027,7 +9091,7 @@
             <a:r>
               <a:rPr lang="pt-BR" sz="2400" b="1" spc="-5" noProof="0" dirty="0">
                 <a:solidFill>
-                  <a:srgbClr val="FFFFFF"/>
+                  <a:schemeClr val="bg1"/>
                 </a:solidFill>
                 <a:latin typeface="Futura Lt BT Light"/>
                 <a:cs typeface="Futura PT Heavy"/>
@@ -9037,7 +9101,7 @@
             <a:r>
               <a:rPr lang="pt-BR" sz="2400" b="1" noProof="0" dirty="0">
                 <a:solidFill>
-                  <a:srgbClr val="FFFFFF"/>
+                  <a:schemeClr val="bg1"/>
                 </a:solidFill>
                 <a:latin typeface="Futura Lt BT Light"/>
                 <a:cs typeface="Futura PT Heavy"/>
@@ -9047,7 +9111,7 @@
             <a:r>
               <a:rPr lang="pt-BR" sz="2400" b="1" spc="-10" noProof="0" dirty="0">
                 <a:solidFill>
-                  <a:srgbClr val="FFFFFF"/>
+                  <a:schemeClr val="bg1"/>
                 </a:solidFill>
                 <a:latin typeface="Futura Lt BT Light"/>
                 <a:cs typeface="Futura PT Heavy"/>
@@ -9055,6 +9119,9 @@
               <a:t>aplicáveis.</a:t>
             </a:r>
             <a:endParaRPr lang="pt-BR" sz="2400" noProof="0" dirty="0">
+              <a:solidFill>
+                <a:schemeClr val="bg1"/>
+              </a:solidFill>
               <a:latin typeface="Futura Lt BT Light"/>
               <a:cs typeface="Futura PT Heavy"/>
             </a:endParaRPr>
@@ -9072,6 +9139,9 @@
               </a:spcAft>
             </a:pPr>
             <a:endParaRPr lang="pt-BR" sz="2400" noProof="0" dirty="0">
+              <a:solidFill>
+                <a:schemeClr val="bg1"/>
+              </a:solidFill>
               <a:latin typeface="Futura Lt BT Light"/>
               <a:cs typeface="Futura PT Heavy"/>
             </a:endParaRPr>
@@ -9091,7 +9161,7 @@
             <a:r>
               <a:rPr lang="pt-BR" sz="2400" noProof="0" dirty="0">
                 <a:solidFill>
-                  <a:srgbClr val="FFFFFF"/>
+                  <a:schemeClr val="bg1"/>
                 </a:solidFill>
                 <a:latin typeface="Futura Lt BT Light"/>
                 <a:cs typeface="Futura PT Book"/>
@@ -9101,7 +9171,7 @@
             <a:r>
               <a:rPr lang="pt-BR" sz="2400" spc="-10" noProof="0" dirty="0">
                 <a:solidFill>
-                  <a:srgbClr val="FFFFFF"/>
+                  <a:schemeClr val="bg1"/>
                 </a:solidFill>
                 <a:latin typeface="Futura Lt BT Light"/>
                 <a:cs typeface="Futura PT Book"/>
@@ -9111,7 +9181,7 @@
             <a:r>
               <a:rPr lang="pt-BR" sz="2400" noProof="0" dirty="0">
                 <a:solidFill>
-                  <a:srgbClr val="FFFFFF"/>
+                  <a:schemeClr val="bg1"/>
                 </a:solidFill>
                 <a:latin typeface="Futura Lt BT Light"/>
                 <a:cs typeface="Futura PT Book"/>
@@ -9121,7 +9191,7 @@
             <a:r>
               <a:rPr lang="pt-BR" sz="2400" spc="-10" noProof="0" dirty="0">
                 <a:solidFill>
-                  <a:srgbClr val="FFFFFF"/>
+                  <a:schemeClr val="bg1"/>
                 </a:solidFill>
                 <a:latin typeface="Futura Lt BT Light"/>
                 <a:cs typeface="Futura PT Book"/>
@@ -9131,7 +9201,7 @@
             <a:r>
               <a:rPr lang="pt-BR" sz="2400" noProof="0" dirty="0">
                 <a:solidFill>
-                  <a:srgbClr val="FFFFFF"/>
+                  <a:schemeClr val="bg1"/>
                 </a:solidFill>
                 <a:latin typeface="Futura Lt BT Light"/>
                 <a:cs typeface="Futura PT Book"/>
@@ -9141,7 +9211,7 @@
             <a:r>
               <a:rPr lang="pt-BR" sz="2400" spc="-5" noProof="0" dirty="0">
                 <a:solidFill>
-                  <a:srgbClr val="FFFFFF"/>
+                  <a:schemeClr val="bg1"/>
                 </a:solidFill>
                 <a:latin typeface="Futura Lt BT Light"/>
                 <a:cs typeface="Futura PT Book"/>
@@ -9151,7 +9221,7 @@
             <a:r>
               <a:rPr lang="pt-BR" sz="2400" noProof="0" dirty="0">
                 <a:solidFill>
-                  <a:srgbClr val="FFFFFF"/>
+                  <a:schemeClr val="bg1"/>
                 </a:solidFill>
                 <a:latin typeface="Futura Lt BT Light"/>
                 <a:cs typeface="Futura PT Book"/>
@@ -9161,7 +9231,7 @@
             <a:r>
               <a:rPr lang="pt-BR" sz="2400" spc="-10" noProof="0" dirty="0">
                 <a:solidFill>
-                  <a:srgbClr val="FFFFFF"/>
+                  <a:schemeClr val="bg1"/>
                 </a:solidFill>
                 <a:latin typeface="Futura Lt BT Light"/>
                 <a:cs typeface="Futura PT Book"/>
@@ -9171,7 +9241,7 @@
             <a:r>
               <a:rPr lang="pt-BR" sz="2400" noProof="0" dirty="0">
                 <a:solidFill>
-                  <a:srgbClr val="FFFFFF"/>
+                  <a:schemeClr val="bg1"/>
                 </a:solidFill>
                 <a:latin typeface="Futura Lt BT Light"/>
                 <a:cs typeface="Futura PT Book"/>
@@ -9181,7 +9251,7 @@
             <a:r>
               <a:rPr lang="pt-BR" sz="2400" spc="-5" noProof="0" dirty="0">
                 <a:solidFill>
-                  <a:srgbClr val="FFFFFF"/>
+                  <a:schemeClr val="bg1"/>
                 </a:solidFill>
                 <a:latin typeface="Futura Lt BT Light"/>
                 <a:cs typeface="Futura PT Book"/>
@@ -9191,7 +9261,7 @@
             <a:r>
               <a:rPr lang="pt-BR" sz="2400" noProof="0" dirty="0">
                 <a:solidFill>
-                  <a:srgbClr val="FFFFFF"/>
+                  <a:schemeClr val="bg1"/>
                 </a:solidFill>
                 <a:latin typeface="Futura Lt BT Light"/>
                 <a:cs typeface="Futura PT Book"/>
@@ -9201,7 +9271,7 @@
             <a:r>
               <a:rPr lang="pt-BR" sz="2400" spc="-10" noProof="0" dirty="0">
                 <a:solidFill>
-                  <a:srgbClr val="FFFFFF"/>
+                  <a:schemeClr val="bg1"/>
                 </a:solidFill>
                 <a:latin typeface="Futura Lt BT Light"/>
                 <a:cs typeface="Futura PT Book"/>
@@ -9211,7 +9281,7 @@
             <a:r>
               <a:rPr lang="pt-BR" sz="2400" noProof="0" dirty="0">
                 <a:solidFill>
-                  <a:srgbClr val="FFFFFF"/>
+                  <a:schemeClr val="bg1"/>
                 </a:solidFill>
                 <a:latin typeface="Futura Lt BT Light"/>
                 <a:cs typeface="Futura PT Book"/>
@@ -9221,7 +9291,7 @@
             <a:r>
               <a:rPr lang="pt-BR" sz="2400" spc="-10" noProof="0" dirty="0">
                 <a:solidFill>
-                  <a:srgbClr val="FFFFFF"/>
+                  <a:schemeClr val="bg1"/>
                 </a:solidFill>
                 <a:latin typeface="Futura Lt BT Light"/>
                 <a:cs typeface="Futura PT Book"/>
@@ -9231,7 +9301,7 @@
             <a:r>
               <a:rPr lang="pt-BR" sz="2400" noProof="0" dirty="0">
                 <a:solidFill>
-                  <a:srgbClr val="FFFFFF"/>
+                  <a:schemeClr val="bg1"/>
                 </a:solidFill>
                 <a:latin typeface="Futura Lt BT Light"/>
                 <a:cs typeface="Futura PT Book"/>
@@ -9241,7 +9311,7 @@
             <a:r>
               <a:rPr lang="pt-BR" sz="2400" spc="-5" noProof="0" dirty="0">
                 <a:solidFill>
-                  <a:srgbClr val="FFFFFF"/>
+                  <a:schemeClr val="bg1"/>
                 </a:solidFill>
                 <a:latin typeface="Futura Lt BT Light"/>
                 <a:cs typeface="Futura PT Book"/>
@@ -9251,7 +9321,7 @@
             <a:r>
               <a:rPr lang="pt-BR" sz="2400" noProof="0" dirty="0">
                 <a:solidFill>
-                  <a:srgbClr val="FFFFFF"/>
+                  <a:schemeClr val="bg1"/>
                 </a:solidFill>
                 <a:latin typeface="Futura Lt BT Light"/>
                 <a:cs typeface="Futura PT Book"/>
@@ -9261,7 +9331,7 @@
             <a:r>
               <a:rPr lang="pt-BR" sz="2400" spc="-10" noProof="0" dirty="0">
                 <a:solidFill>
-                  <a:srgbClr val="FFFFFF"/>
+                  <a:schemeClr val="bg1"/>
                 </a:solidFill>
                 <a:latin typeface="Futura Lt BT Light"/>
                 <a:cs typeface="Futura PT Book"/>
@@ -9271,7 +9341,7 @@
             <a:r>
               <a:rPr lang="pt-BR" sz="2400" noProof="0" dirty="0">
                 <a:solidFill>
-                  <a:srgbClr val="FFFFFF"/>
+                  <a:schemeClr val="bg1"/>
                 </a:solidFill>
                 <a:latin typeface="Futura Lt BT Light"/>
                 <a:cs typeface="Futura PT Book"/>
@@ -9281,7 +9351,7 @@
             <a:r>
               <a:rPr lang="pt-BR" sz="2400" spc="-5" noProof="0" dirty="0">
                 <a:solidFill>
-                  <a:srgbClr val="FFFFFF"/>
+                  <a:schemeClr val="bg1"/>
                 </a:solidFill>
                 <a:latin typeface="Futura Lt BT Light"/>
                 <a:cs typeface="Futura PT Book"/>
@@ -9291,7 +9361,7 @@
             <a:r>
               <a:rPr lang="pt-BR" sz="2400" noProof="0" dirty="0">
                 <a:solidFill>
-                  <a:srgbClr val="FFFFFF"/>
+                  <a:schemeClr val="bg1"/>
                 </a:solidFill>
                 <a:latin typeface="Futura Lt BT Light"/>
                 <a:cs typeface="Futura PT Book"/>
@@ -9301,7 +9371,7 @@
             <a:r>
               <a:rPr lang="pt-BR" sz="2400" spc="-10" noProof="0" dirty="0">
                 <a:solidFill>
-                  <a:srgbClr val="FFFFFF"/>
+                  <a:schemeClr val="bg1"/>
                 </a:solidFill>
                 <a:latin typeface="Futura Lt BT Light"/>
                 <a:cs typeface="Futura PT Book"/>
@@ -9311,7 +9381,7 @@
             <a:r>
               <a:rPr lang="pt-BR" sz="2400" noProof="0" dirty="0">
                 <a:solidFill>
-                  <a:srgbClr val="FFFFFF"/>
+                  <a:schemeClr val="bg1"/>
                 </a:solidFill>
                 <a:latin typeface="Futura Lt BT Light"/>
                 <a:cs typeface="Futura PT Book"/>
@@ -9321,7 +9391,7 @@
             <a:r>
               <a:rPr lang="pt-BR" sz="2400" spc="-5" noProof="0" dirty="0">
                 <a:solidFill>
-                  <a:srgbClr val="FFFFFF"/>
+                  <a:schemeClr val="bg1"/>
                 </a:solidFill>
                 <a:latin typeface="Futura Lt BT Light"/>
                 <a:cs typeface="Futura PT Book"/>
@@ -9331,7 +9401,7 @@
             <a:r>
               <a:rPr lang="pt-BR" sz="2400" spc="-10" noProof="0" dirty="0">
                 <a:solidFill>
-                  <a:srgbClr val="FFFFFF"/>
+                  <a:schemeClr val="bg1"/>
                 </a:solidFill>
                 <a:latin typeface="Futura Lt BT Light"/>
                 <a:cs typeface="Futura PT Book"/>
@@ -9339,6 +9409,9 @@
               <a:t>contratante.</a:t>
             </a:r>
             <a:endParaRPr lang="pt-BR" sz="2400" noProof="0" dirty="0">
+              <a:solidFill>
+                <a:schemeClr val="bg1"/>
+              </a:solidFill>
               <a:latin typeface="Futura Lt BT Light"/>
               <a:cs typeface="Futura PT Book"/>
             </a:endParaRPr>
@@ -9358,7 +9431,7 @@
             <a:r>
               <a:rPr lang="pt-BR" sz="2400" noProof="0" dirty="0">
                 <a:solidFill>
-                  <a:srgbClr val="FFFFFF"/>
+                  <a:schemeClr val="bg1"/>
                 </a:solidFill>
                 <a:latin typeface="Futura Lt BT Light"/>
                 <a:cs typeface="Futura PT Book"/>
@@ -9368,7 +9441,7 @@
             <a:r>
               <a:rPr lang="pt-BR" sz="2400" spc="-25" noProof="0" dirty="0">
                 <a:solidFill>
-                  <a:srgbClr val="FFFFFF"/>
+                  <a:schemeClr val="bg1"/>
                 </a:solidFill>
                 <a:latin typeface="Futura Lt BT Light"/>
                 <a:cs typeface="Futura PT Book"/>
@@ -9378,7 +9451,7 @@
             <a:r>
               <a:rPr lang="pt-BR" sz="2400" noProof="0" dirty="0">
                 <a:solidFill>
-                  <a:srgbClr val="FFFFFF"/>
+                  <a:schemeClr val="bg1"/>
                 </a:solidFill>
                 <a:latin typeface="Futura Lt BT Light"/>
                 <a:cs typeface="Futura PT Book"/>
@@ -9388,7 +9461,7 @@
             <a:r>
               <a:rPr lang="pt-BR" sz="2400" spc="-10" noProof="0" dirty="0">
                 <a:solidFill>
-                  <a:srgbClr val="FFFFFF"/>
+                  <a:schemeClr val="bg1"/>
                 </a:solidFill>
                 <a:latin typeface="Futura Lt BT Light"/>
                 <a:cs typeface="Futura PT Book"/>
@@ -9398,7 +9471,7 @@
             <a:r>
               <a:rPr lang="pt-BR" sz="2400" noProof="0" dirty="0">
                 <a:solidFill>
-                  <a:srgbClr val="FFFFFF"/>
+                  <a:schemeClr val="bg1"/>
                 </a:solidFill>
                 <a:latin typeface="Futura Lt BT Light"/>
                 <a:cs typeface="Futura PT Book"/>
@@ -9408,7 +9481,7 @@
             <a:r>
               <a:rPr lang="pt-BR" sz="2400" spc="-10" noProof="0" dirty="0">
                 <a:solidFill>
-                  <a:srgbClr val="FFFFFF"/>
+                  <a:schemeClr val="bg1"/>
                 </a:solidFill>
                 <a:latin typeface="Futura Lt BT Light"/>
                 <a:cs typeface="Futura PT Book"/>
@@ -9418,7 +9491,7 @@
             <a:r>
               <a:rPr lang="pt-BR" sz="2400" noProof="0" dirty="0">
                 <a:solidFill>
-                  <a:srgbClr val="FFFFFF"/>
+                  <a:schemeClr val="bg1"/>
                 </a:solidFill>
                 <a:latin typeface="Futura Lt BT Light"/>
                 <a:cs typeface="Futura PT Book"/>
@@ -9428,7 +9501,7 @@
             <a:r>
               <a:rPr lang="pt-BR" sz="2400" spc="-10" noProof="0" dirty="0">
                 <a:solidFill>
-                  <a:srgbClr val="FFFFFF"/>
+                  <a:schemeClr val="bg1"/>
                 </a:solidFill>
                 <a:latin typeface="Futura Lt BT Light"/>
                 <a:cs typeface="Futura PT Book"/>
@@ -9438,7 +9511,7 @@
             <a:r>
               <a:rPr lang="pt-BR" sz="2400" noProof="0" dirty="0">
                 <a:solidFill>
-                  <a:srgbClr val="FFFFFF"/>
+                  <a:schemeClr val="bg1"/>
                 </a:solidFill>
                 <a:latin typeface="Futura Lt BT Light"/>
                 <a:cs typeface="Futura PT Book"/>
@@ -9448,7 +9521,7 @@
             <a:r>
               <a:rPr lang="pt-BR" sz="2400" spc="-10" noProof="0" dirty="0">
                 <a:solidFill>
-                  <a:srgbClr val="FFFFFF"/>
+                  <a:schemeClr val="bg1"/>
                 </a:solidFill>
                 <a:latin typeface="Futura Lt BT Light"/>
                 <a:cs typeface="Futura PT Book"/>
@@ -9458,7 +9531,7 @@
             <a:r>
               <a:rPr lang="pt-BR" sz="2400" noProof="0" dirty="0">
                 <a:solidFill>
-                  <a:srgbClr val="FFFFFF"/>
+                  <a:schemeClr val="bg1"/>
                 </a:solidFill>
                 <a:latin typeface="Futura Lt BT Light"/>
                 <a:cs typeface="Futura PT Book"/>
@@ -9468,7 +9541,7 @@
             <a:r>
               <a:rPr lang="pt-BR" sz="2400" spc="-10" noProof="0" dirty="0">
                 <a:solidFill>
-                  <a:srgbClr val="FFFFFF"/>
+                  <a:schemeClr val="bg1"/>
                 </a:solidFill>
                 <a:latin typeface="Futura Lt BT Light"/>
                 <a:cs typeface="Futura PT Book"/>
@@ -9478,7 +9551,7 @@
             <a:r>
               <a:rPr lang="pt-BR" sz="2400" noProof="0" dirty="0">
                 <a:solidFill>
-                  <a:srgbClr val="FFFFFF"/>
+                  <a:schemeClr val="bg1"/>
                 </a:solidFill>
                 <a:latin typeface="Futura Lt BT Light"/>
                 <a:cs typeface="Futura PT Book"/>
@@ -9488,7 +9561,7 @@
             <a:r>
               <a:rPr lang="pt-BR" sz="2400" spc="-10" noProof="0" dirty="0">
                 <a:solidFill>
-                  <a:srgbClr val="FFFFFF"/>
+                  <a:schemeClr val="bg1"/>
                 </a:solidFill>
                 <a:latin typeface="Futura Lt BT Light"/>
                 <a:cs typeface="Futura PT Book"/>
@@ -9498,7 +9571,7 @@
             <a:r>
               <a:rPr lang="pt-BR" sz="2400" noProof="0" dirty="0">
                 <a:solidFill>
-                  <a:srgbClr val="FFFFFF"/>
+                  <a:schemeClr val="bg1"/>
                 </a:solidFill>
                 <a:latin typeface="Futura Lt BT Light"/>
                 <a:cs typeface="Futura PT Book"/>
@@ -9508,7 +9581,7 @@
             <a:r>
               <a:rPr lang="pt-BR" sz="2400" spc="-10" noProof="0" dirty="0">
                 <a:solidFill>
-                  <a:srgbClr val="FFFFFF"/>
+                  <a:schemeClr val="bg1"/>
                 </a:solidFill>
                 <a:latin typeface="Futura Lt BT Light"/>
                 <a:cs typeface="Futura PT Book"/>
@@ -9518,7 +9591,7 @@
             <a:r>
               <a:rPr lang="pt-BR" sz="2400" noProof="0" dirty="0">
                 <a:solidFill>
-                  <a:srgbClr val="FFFFFF"/>
+                  <a:schemeClr val="bg1"/>
                 </a:solidFill>
                 <a:latin typeface="Futura Lt BT Light"/>
                 <a:cs typeface="Futura PT Book"/>
@@ -9528,7 +9601,7 @@
             <a:r>
               <a:rPr lang="pt-BR" sz="2400" spc="-10" noProof="0" dirty="0">
                 <a:solidFill>
-                  <a:srgbClr val="FFFFFF"/>
+                  <a:schemeClr val="bg1"/>
                 </a:solidFill>
                 <a:latin typeface="Futura Lt BT Light"/>
                 <a:cs typeface="Futura PT Book"/>
@@ -9538,7 +9611,7 @@
             <a:r>
               <a:rPr lang="pt-BR" sz="2400" noProof="0" dirty="0">
                 <a:solidFill>
-                  <a:srgbClr val="FFFFFF"/>
+                  <a:schemeClr val="bg1"/>
                 </a:solidFill>
                 <a:latin typeface="Futura Lt BT Light"/>
                 <a:cs typeface="Futura PT Book"/>
@@ -9548,7 +9621,7 @@
             <a:r>
               <a:rPr lang="pt-BR" sz="2400" spc="-10" noProof="0" dirty="0">
                 <a:solidFill>
-                  <a:srgbClr val="FFFFFF"/>
+                  <a:schemeClr val="bg1"/>
                 </a:solidFill>
                 <a:latin typeface="Futura Lt BT Light"/>
                 <a:cs typeface="Futura PT Book"/>
@@ -9558,7 +9631,7 @@
             <a:r>
               <a:rPr lang="pt-BR" sz="2400" noProof="0" dirty="0">
                 <a:solidFill>
-                  <a:srgbClr val="FFFFFF"/>
+                  <a:schemeClr val="bg1"/>
                 </a:solidFill>
                 <a:latin typeface="Futura Lt BT Light"/>
                 <a:cs typeface="Futura PT Book"/>
@@ -9568,7 +9641,7 @@
             <a:r>
               <a:rPr lang="pt-BR" sz="2400" spc="-10" noProof="0" dirty="0">
                 <a:solidFill>
-                  <a:srgbClr val="FFFFFF"/>
+                  <a:schemeClr val="bg1"/>
                 </a:solidFill>
                 <a:latin typeface="Futura Lt BT Light"/>
                 <a:cs typeface="Futura PT Book"/>
@@ -9578,7 +9651,7 @@
             <a:r>
               <a:rPr lang="pt-BR" sz="2400" noProof="0" dirty="0">
                 <a:solidFill>
-                  <a:srgbClr val="FFFFFF"/>
+                  <a:schemeClr val="bg1"/>
                 </a:solidFill>
                 <a:latin typeface="Futura Lt BT Light"/>
                 <a:cs typeface="Futura PT Book"/>
@@ -9588,7 +9661,7 @@
             <a:r>
               <a:rPr lang="pt-BR" sz="2400" spc="-10" noProof="0" dirty="0">
                 <a:solidFill>
-                  <a:srgbClr val="FFFFFF"/>
+                  <a:schemeClr val="bg1"/>
                 </a:solidFill>
                 <a:latin typeface="Futura Lt BT Light"/>
                 <a:cs typeface="Futura PT Book"/>
@@ -9598,7 +9671,7 @@
             <a:r>
               <a:rPr lang="pt-BR" sz="2400" noProof="0" dirty="0">
                 <a:solidFill>
-                  <a:srgbClr val="FFFFFF"/>
+                  <a:schemeClr val="bg1"/>
                 </a:solidFill>
                 <a:latin typeface="Futura Lt BT Light"/>
                 <a:cs typeface="Futura PT Book"/>
@@ -9608,7 +9681,7 @@
             <a:r>
               <a:rPr lang="pt-BR" sz="2400" spc="-10" noProof="0" dirty="0">
                 <a:solidFill>
-                  <a:srgbClr val="FFFFFF"/>
+                  <a:schemeClr val="bg1"/>
                 </a:solidFill>
                 <a:latin typeface="Futura Lt BT Light"/>
                 <a:cs typeface="Futura PT Book"/>
@@ -9618,7 +9691,7 @@
             <a:r>
               <a:rPr lang="pt-BR" sz="2400" noProof="0" dirty="0">
                 <a:solidFill>
-                  <a:srgbClr val="FFFFFF"/>
+                  <a:schemeClr val="bg1"/>
                 </a:solidFill>
                 <a:latin typeface="Futura Lt BT Light"/>
                 <a:cs typeface="Futura PT Book"/>
@@ -9628,7 +9701,7 @@
             <a:r>
               <a:rPr lang="pt-BR" sz="2400" spc="-10" noProof="0" dirty="0">
                 <a:solidFill>
-                  <a:srgbClr val="FFFFFF"/>
+                  <a:schemeClr val="bg1"/>
                 </a:solidFill>
                 <a:latin typeface="Futura Lt BT Light"/>
                 <a:cs typeface="Futura PT Book"/>
@@ -9638,7 +9711,7 @@
             <a:r>
               <a:rPr lang="pt-BR" sz="2400" noProof="0" dirty="0">
                 <a:solidFill>
-                  <a:srgbClr val="FFFFFF"/>
+                  <a:schemeClr val="bg1"/>
                 </a:solidFill>
                 <a:latin typeface="Futura Lt BT Light"/>
                 <a:cs typeface="Futura PT Book"/>
@@ -9648,7 +9721,7 @@
             <a:r>
               <a:rPr lang="pt-BR" sz="2400" spc="-10" noProof="0" dirty="0">
                 <a:solidFill>
-                  <a:srgbClr val="FFFFFF"/>
+                  <a:schemeClr val="bg1"/>
                 </a:solidFill>
                 <a:latin typeface="Futura Lt BT Light"/>
                 <a:cs typeface="Futura PT Book"/>
@@ -9658,7 +9731,7 @@
             <a:r>
               <a:rPr lang="pt-BR" sz="2400" noProof="0" dirty="0">
                 <a:solidFill>
-                  <a:srgbClr val="FFFFFF"/>
+                  <a:schemeClr val="bg1"/>
                 </a:solidFill>
                 <a:latin typeface="Futura Lt BT Light"/>
                 <a:cs typeface="Futura PT Book"/>
@@ -9668,7 +9741,7 @@
             <a:r>
               <a:rPr lang="pt-BR" sz="2400" spc="-10" noProof="0" dirty="0">
                 <a:solidFill>
-                  <a:srgbClr val="FFFFFF"/>
+                  <a:schemeClr val="bg1"/>
                 </a:solidFill>
                 <a:latin typeface="Futura Lt BT Light"/>
                 <a:cs typeface="Futura PT Book"/>
@@ -9678,7 +9751,7 @@
             <a:r>
               <a:rPr lang="pt-BR" sz="2400" noProof="0" dirty="0">
                 <a:solidFill>
-                  <a:srgbClr val="FFFFFF"/>
+                  <a:schemeClr val="bg1"/>
                 </a:solidFill>
                 <a:latin typeface="Futura Lt BT Light"/>
                 <a:cs typeface="Futura PT Book"/>
@@ -9688,7 +9761,7 @@
             <a:r>
               <a:rPr lang="pt-BR" sz="2400" spc="-10" noProof="0" dirty="0">
                 <a:solidFill>
-                  <a:srgbClr val="FFFFFF"/>
+                  <a:schemeClr val="bg1"/>
                 </a:solidFill>
                 <a:latin typeface="Futura Lt BT Light"/>
                 <a:cs typeface="Futura PT Book"/>
@@ -9698,7 +9771,7 @@
             <a:r>
               <a:rPr lang="pt-BR" sz="2400" noProof="0" dirty="0">
                 <a:solidFill>
-                  <a:srgbClr val="FFFFFF"/>
+                  <a:schemeClr val="bg1"/>
                 </a:solidFill>
                 <a:latin typeface="Futura Lt BT Light"/>
                 <a:cs typeface="Futura PT Book"/>
@@ -9708,7 +9781,7 @@
             <a:r>
               <a:rPr lang="pt-BR" sz="2400" spc="-10" noProof="0" dirty="0">
                 <a:solidFill>
-                  <a:srgbClr val="FFFFFF"/>
+                  <a:schemeClr val="bg1"/>
                 </a:solidFill>
                 <a:latin typeface="Futura Lt BT Light"/>
                 <a:cs typeface="Futura PT Book"/>
@@ -9718,7 +9791,7 @@
             <a:r>
               <a:rPr lang="pt-BR" sz="2400" noProof="0" dirty="0">
                 <a:solidFill>
-                  <a:srgbClr val="FFFFFF"/>
+                  <a:schemeClr val="bg1"/>
                 </a:solidFill>
                 <a:latin typeface="Futura Lt BT Light"/>
                 <a:cs typeface="Futura PT Book"/>
@@ -9728,7 +9801,7 @@
             <a:r>
               <a:rPr lang="pt-BR" sz="2400" spc="-10" noProof="0" dirty="0">
                 <a:solidFill>
-                  <a:srgbClr val="FFFFFF"/>
+                  <a:schemeClr val="bg1"/>
                 </a:solidFill>
                 <a:latin typeface="Futura Lt BT Light"/>
                 <a:cs typeface="Futura PT Book"/>
@@ -9738,7 +9811,7 @@
             <a:r>
               <a:rPr lang="pt-BR" sz="2400" noProof="0" dirty="0">
                 <a:solidFill>
-                  <a:srgbClr val="FFFFFF"/>
+                  <a:schemeClr val="bg1"/>
                 </a:solidFill>
                 <a:latin typeface="Futura Lt BT Light"/>
                 <a:cs typeface="Futura PT Book"/>
@@ -9748,7 +9821,7 @@
             <a:r>
               <a:rPr lang="pt-BR" sz="2400" spc="-10" noProof="0" dirty="0">
                 <a:solidFill>
-                  <a:srgbClr val="FFFFFF"/>
+                  <a:schemeClr val="bg1"/>
                 </a:solidFill>
                 <a:latin typeface="Futura Lt BT Light"/>
                 <a:cs typeface="Futura PT Book"/>
@@ -9758,7 +9831,7 @@
             <a:r>
               <a:rPr lang="pt-BR" sz="2400" noProof="0" dirty="0">
                 <a:solidFill>
-                  <a:srgbClr val="FFFFFF"/>
+                  <a:schemeClr val="bg1"/>
                 </a:solidFill>
                 <a:latin typeface="Futura Lt BT Light"/>
                 <a:cs typeface="Futura PT Book"/>
@@ -9768,7 +9841,7 @@
             <a:r>
               <a:rPr lang="pt-BR" sz="2400" spc="-10" noProof="0" dirty="0">
                 <a:solidFill>
-                  <a:srgbClr val="FFFFFF"/>
+                  <a:schemeClr val="bg1"/>
                 </a:solidFill>
                 <a:latin typeface="Futura Lt BT Light"/>
                 <a:cs typeface="Futura PT Book"/>
@@ -9778,7 +9851,7 @@
             <a:r>
               <a:rPr lang="pt-BR" sz="2400" spc="-25" noProof="0" dirty="0">
                 <a:solidFill>
-                  <a:srgbClr val="FFFFFF"/>
+                  <a:schemeClr val="bg1"/>
                 </a:solidFill>
                 <a:latin typeface="Futura Lt BT Light"/>
                 <a:cs typeface="Futura PT Book"/>
@@ -9788,7 +9861,7 @@
             <a:r>
               <a:rPr lang="pt-BR" sz="2400" noProof="0" dirty="0">
                 <a:solidFill>
-                  <a:srgbClr val="FFFFFF"/>
+                  <a:schemeClr val="bg1"/>
                 </a:solidFill>
                 <a:latin typeface="Futura Lt BT Light"/>
                 <a:cs typeface="Futura PT Book"/>
@@ -9798,7 +9871,7 @@
             <a:r>
               <a:rPr lang="pt-BR" sz="2400" spc="5" noProof="0" dirty="0">
                 <a:solidFill>
-                  <a:srgbClr val="FFFFFF"/>
+                  <a:schemeClr val="bg1"/>
                 </a:solidFill>
                 <a:latin typeface="Futura Lt BT Light"/>
                 <a:cs typeface="Futura PT Book"/>
@@ -9808,7 +9881,7 @@
             <a:r>
               <a:rPr lang="pt-BR" sz="2400" noProof="0" dirty="0">
                 <a:solidFill>
-                  <a:srgbClr val="FFFFFF"/>
+                  <a:schemeClr val="bg1"/>
                 </a:solidFill>
                 <a:latin typeface="Futura Lt BT Light"/>
                 <a:cs typeface="Futura PT Book"/>
@@ -9818,7 +9891,7 @@
             <a:r>
               <a:rPr lang="pt-BR" sz="2400" spc="5" noProof="0" dirty="0">
                 <a:solidFill>
-                  <a:srgbClr val="FFFFFF"/>
+                  <a:schemeClr val="bg1"/>
                 </a:solidFill>
                 <a:latin typeface="Futura Lt BT Light"/>
                 <a:cs typeface="Futura PT Book"/>
@@ -9828,7 +9901,7 @@
             <a:r>
               <a:rPr lang="pt-BR" sz="2400" noProof="0" dirty="0">
                 <a:solidFill>
-                  <a:srgbClr val="FFFFFF"/>
+                  <a:schemeClr val="bg1"/>
                 </a:solidFill>
                 <a:latin typeface="Futura Lt BT Light"/>
                 <a:cs typeface="Futura PT Book"/>
@@ -9838,7 +9911,7 @@
             <a:r>
               <a:rPr lang="pt-BR" sz="2400" spc="5" noProof="0" dirty="0">
                 <a:solidFill>
-                  <a:srgbClr val="FFFFFF"/>
+                  <a:schemeClr val="bg1"/>
                 </a:solidFill>
                 <a:latin typeface="Futura Lt BT Light"/>
                 <a:cs typeface="Futura PT Book"/>
@@ -9848,7 +9921,7 @@
             <a:r>
               <a:rPr lang="pt-BR" sz="2400" noProof="0" dirty="0">
                 <a:solidFill>
-                  <a:srgbClr val="FFFFFF"/>
+                  <a:schemeClr val="bg1"/>
                 </a:solidFill>
                 <a:latin typeface="Futura Lt BT Light"/>
                 <a:cs typeface="Futura PT Book"/>
@@ -9858,7 +9931,7 @@
             <a:r>
               <a:rPr lang="pt-BR" sz="2400" spc="5" noProof="0" dirty="0">
                 <a:solidFill>
-                  <a:srgbClr val="FFFFFF"/>
+                  <a:schemeClr val="bg1"/>
                 </a:solidFill>
                 <a:latin typeface="Futura Lt BT Light"/>
                 <a:cs typeface="Futura PT Book"/>
@@ -9868,7 +9941,7 @@
             <a:r>
               <a:rPr lang="pt-BR" sz="2400" noProof="0" dirty="0">
                 <a:solidFill>
-                  <a:srgbClr val="FFFFFF"/>
+                  <a:schemeClr val="bg1"/>
                 </a:solidFill>
                 <a:latin typeface="Futura Lt BT Light"/>
                 <a:cs typeface="Futura PT Book"/>
@@ -9878,7 +9951,7 @@
             <a:r>
               <a:rPr lang="pt-BR" sz="2400" spc="-5" noProof="0" dirty="0">
                 <a:solidFill>
-                  <a:srgbClr val="FFFFFF"/>
+                  <a:schemeClr val="bg1"/>
                 </a:solidFill>
                 <a:latin typeface="Futura Lt BT Light"/>
                 <a:cs typeface="Futura PT Book"/>
@@ -9888,7 +9961,7 @@
             <a:r>
               <a:rPr lang="pt-BR" sz="2400" noProof="0" dirty="0">
                 <a:solidFill>
-                  <a:srgbClr val="FFFFFF"/>
+                  <a:schemeClr val="bg1"/>
                 </a:solidFill>
                 <a:latin typeface="Futura Lt BT Light"/>
                 <a:cs typeface="Futura PT Book"/>
@@ -9898,7 +9971,7 @@
             <a:r>
               <a:rPr lang="pt-BR" sz="2400" spc="5" noProof="0" dirty="0">
                 <a:solidFill>
-                  <a:srgbClr val="FFFFFF"/>
+                  <a:schemeClr val="bg1"/>
                 </a:solidFill>
                 <a:latin typeface="Futura Lt BT Light"/>
                 <a:cs typeface="Futura PT Book"/>
@@ -9908,7 +9981,7 @@
             <a:r>
               <a:rPr lang="pt-BR" sz="2400" noProof="0" dirty="0">
                 <a:solidFill>
-                  <a:srgbClr val="FFFFFF"/>
+                  <a:schemeClr val="bg1"/>
                 </a:solidFill>
                 <a:latin typeface="Futura Lt BT Light"/>
                 <a:cs typeface="Futura PT Book"/>
@@ -9918,7 +9991,7 @@
             <a:r>
               <a:rPr lang="pt-BR" sz="2400" spc="5" noProof="0" dirty="0">
                 <a:solidFill>
-                  <a:srgbClr val="FFFFFF"/>
+                  <a:schemeClr val="bg1"/>
                 </a:solidFill>
                 <a:latin typeface="Futura Lt BT Light"/>
                 <a:cs typeface="Futura PT Book"/>
@@ -9928,7 +10001,7 @@
             <a:r>
               <a:rPr lang="pt-BR" sz="2400" noProof="0" dirty="0">
                 <a:solidFill>
-                  <a:srgbClr val="FFFFFF"/>
+                  <a:schemeClr val="bg1"/>
                 </a:solidFill>
                 <a:latin typeface="Futura Lt BT Light"/>
                 <a:cs typeface="Futura PT Book"/>
@@ -9938,7 +10011,7 @@
             <a:r>
               <a:rPr lang="pt-BR" sz="2400" spc="5" noProof="0" dirty="0">
                 <a:solidFill>
-                  <a:srgbClr val="FFFFFF"/>
+                  <a:schemeClr val="bg1"/>
                 </a:solidFill>
                 <a:latin typeface="Futura Lt BT Light"/>
                 <a:cs typeface="Futura PT Book"/>
@@ -9948,7 +10021,7 @@
             <a:r>
               <a:rPr lang="pt-BR" sz="2400" noProof="0" dirty="0">
                 <a:solidFill>
-                  <a:srgbClr val="FFFFFF"/>
+                  <a:schemeClr val="bg1"/>
                 </a:solidFill>
                 <a:latin typeface="Futura Lt BT Light"/>
                 <a:cs typeface="Futura PT Book"/>
@@ -9958,7 +10031,7 @@
             <a:r>
               <a:rPr lang="pt-BR" sz="2400" spc="5" noProof="0" dirty="0">
                 <a:solidFill>
-                  <a:srgbClr val="FFFFFF"/>
+                  <a:schemeClr val="bg1"/>
                 </a:solidFill>
                 <a:latin typeface="Futura Lt BT Light"/>
                 <a:cs typeface="Futura PT Book"/>
@@ -9968,7 +10041,7 @@
             <a:r>
               <a:rPr lang="pt-BR" sz="2400" noProof="0" dirty="0">
                 <a:solidFill>
-                  <a:srgbClr val="FFFFFF"/>
+                  <a:schemeClr val="bg1"/>
                 </a:solidFill>
                 <a:latin typeface="Futura Lt BT Light"/>
                 <a:cs typeface="Futura PT Book"/>
@@ -9978,7 +10051,7 @@
             <a:r>
               <a:rPr lang="pt-BR" sz="2400" spc="5" noProof="0" dirty="0">
                 <a:solidFill>
-                  <a:srgbClr val="FFFFFF"/>
+                  <a:schemeClr val="bg1"/>
                 </a:solidFill>
                 <a:latin typeface="Futura Lt BT Light"/>
                 <a:cs typeface="Futura PT Book"/>
@@ -9988,7 +10061,7 @@
             <a:r>
               <a:rPr lang="pt-BR" sz="2400" noProof="0" dirty="0">
                 <a:solidFill>
-                  <a:srgbClr val="FFFFFF"/>
+                  <a:schemeClr val="bg1"/>
                 </a:solidFill>
                 <a:latin typeface="Futura Lt BT Light"/>
                 <a:cs typeface="Futura PT Book"/>
@@ -9998,7 +10071,7 @@
             <a:r>
               <a:rPr lang="pt-BR" sz="2400" spc="-5" noProof="0" dirty="0">
                 <a:solidFill>
-                  <a:srgbClr val="FFFFFF"/>
+                  <a:schemeClr val="bg1"/>
                 </a:solidFill>
                 <a:latin typeface="Futura Lt BT Light"/>
                 <a:cs typeface="Futura PT Book"/>
@@ -10008,7 +10081,7 @@
             <a:r>
               <a:rPr lang="pt-BR" sz="2400" noProof="0" dirty="0">
                 <a:solidFill>
-                  <a:srgbClr val="FFFFFF"/>
+                  <a:schemeClr val="bg1"/>
                 </a:solidFill>
                 <a:latin typeface="Futura Lt BT Light"/>
                 <a:cs typeface="Futura PT Book"/>
@@ -10018,7 +10091,7 @@
             <a:r>
               <a:rPr lang="pt-BR" sz="2400" spc="5" noProof="0" dirty="0">
                 <a:solidFill>
-                  <a:srgbClr val="FFFFFF"/>
+                  <a:schemeClr val="bg1"/>
                 </a:solidFill>
                 <a:latin typeface="Futura Lt BT Light"/>
                 <a:cs typeface="Futura PT Book"/>
@@ -10028,7 +10101,7 @@
             <a:r>
               <a:rPr lang="pt-BR" sz="2400" noProof="0" dirty="0">
                 <a:solidFill>
-                  <a:srgbClr val="FFFFFF"/>
+                  <a:schemeClr val="bg1"/>
                 </a:solidFill>
                 <a:latin typeface="Futura Lt BT Light"/>
                 <a:cs typeface="Futura PT Book"/>
@@ -10038,7 +10111,7 @@
             <a:r>
               <a:rPr lang="pt-BR" sz="2400" spc="5" noProof="0" dirty="0">
                 <a:solidFill>
-                  <a:srgbClr val="FFFFFF"/>
+                  <a:schemeClr val="bg1"/>
                 </a:solidFill>
                 <a:latin typeface="Futura Lt BT Light"/>
                 <a:cs typeface="Futura PT Book"/>
@@ -10048,7 +10121,7 @@
             <a:r>
               <a:rPr lang="pt-BR" sz="2400" noProof="0" dirty="0">
                 <a:solidFill>
-                  <a:srgbClr val="FFFFFF"/>
+                  <a:schemeClr val="bg1"/>
                 </a:solidFill>
                 <a:latin typeface="Futura Lt BT Light"/>
                 <a:cs typeface="Futura PT Book"/>
@@ -10058,14 +10131,34 @@
             <a:r>
               <a:rPr lang="pt-BR" sz="2400" spc="-10" noProof="0" dirty="0">
                 <a:solidFill>
-                  <a:srgbClr val="FFFFFF"/>
+                  <a:schemeClr val="bg1"/>
                 </a:solidFill>
                 <a:latin typeface="Futura Lt BT Light"/>
                 <a:cs typeface="Futura PT Book"/>
               </a:rPr>
               <a:t>inadimplemento.</a:t>
             </a:r>
-            <a:endParaRPr lang="pt-BR" sz="2400" noProof="0" dirty="0">
+            <a:endParaRPr lang="pt-BR" sz="2400" dirty="0">
+              <a:solidFill>
+                <a:schemeClr val="bg1"/>
+              </a:solidFill>
+              <a:latin typeface="Futura Lt BT Light"/>
+              <a:ea typeface="Calibri" panose="020F0502020204030204" pitchFamily="34" charset="0"/>
+            </a:endParaRPr>
+          </a:p>
+          <a:p>
+            <a:pPr algn="just">
+              <a:lnSpc>
+                <a:spcPct val="100000"/>
+              </a:lnSpc>
+              <a:spcBef>
+                <a:spcPts val="20"/>
+              </a:spcBef>
+            </a:pPr>
+            <a:endParaRPr lang="pt-BR" sz="2400" dirty="0">
+              <a:solidFill>
+                <a:schemeClr val="bg1"/>
+              </a:solidFill>
               <a:latin typeface="Futura Lt BT Light"/>
               <a:cs typeface="Futura PT Book"/>
             </a:endParaRPr>
@@ -19115,7 +19208,7 @@
               <a:rPr lang="pt-BR" sz="2450" dirty="0">
                 <a:latin typeface="Futura Lt BT" panose="020B0402020204020303" pitchFamily="34" charset="0"/>
               </a:rPr>
-              <a:t>Prezado </a:t>
+              <a:t>Prezado Sr. </a:t>
             </a:r>
             <a:r>
               <a:rPr sz="2450" dirty="0">
